--- a/ppt/embedded-mcp-toolkit-项目介绍.pptx
+++ b/ppt/embedded-mcp-toolkit-项目介绍.pptx
@@ -4307,22 +4307,28 @@
       </p:sp>
       <p:pic>
         <p:nvPicPr>
-          <p:cNvPr id="5" name="Image 0" descr=".tmp/final_mcp_roles.png">    </p:cNvPr>
+          <p:cNvPr id="5" name="Image 0" descr="../docs/项目简介/img/mcp-architecture.svg">    </p:cNvPr>
           <p:cNvPicPr>
             <a:picLocks noChangeAspect="1"/>
           </p:cNvPicPr>
           <p:nvPr/>
         </p:nvPicPr>
         <p:blipFill>
-          <a:blip r:embed="rId1"/>
+          <a:blip r:embed="rId1">
+            <a:extLst>
+              <a:ext uri="{96DAC541-7B7A-43D3-8B79-37D633B846F1}">
+                <asvg:svgBlip xmlns:asvg="http://schemas.microsoft.com/office/drawing/2016/SVG/main" r:embed="rId2"/>
+              </a:ext>
+            </a:extLst>
+          </a:blip>
           <a:stretch>
             <a:fillRect/>
           </a:stretch>
         </p:blipFill>
         <p:spPr>
           <a:xfrm>
-            <a:off x="1979676" y="1517904"/>
-            <a:ext cx="8229600" cy="4436681"/>
+            <a:off x="2347895" y="1517904"/>
+            <a:ext cx="7493161" cy="4480560"/>
           </a:xfrm>
           <a:prstGeom prst="rect">
             <a:avLst/>
@@ -9673,22 +9679,28 @@
       </p:sp>
       <p:pic>
         <p:nvPicPr>
-          <p:cNvPr id="5" name="Image 0" descr=".tmp/trimmed_image3.png">    </p:cNvPr>
+          <p:cNvPr id="5" name="Image 0" descr="../docs/项目简介/img/usage1-local.svg">    </p:cNvPr>
           <p:cNvPicPr>
             <a:picLocks noChangeAspect="1"/>
           </p:cNvPicPr>
           <p:nvPr/>
         </p:nvPicPr>
         <p:blipFill>
-          <a:blip r:embed="rId1"/>
+          <a:blip r:embed="rId1">
+            <a:extLst>
+              <a:ext uri="{96DAC541-7B7A-43D3-8B79-37D633B846F1}">
+                <asvg:svgBlip xmlns:asvg="http://schemas.microsoft.com/office/drawing/2016/SVG/main" r:embed="rId2"/>
+              </a:ext>
+            </a:extLst>
+          </a:blip>
           <a:stretch>
             <a:fillRect/>
           </a:stretch>
         </p:blipFill>
         <p:spPr>
           <a:xfrm>
-            <a:off x="566928" y="1481328"/>
-            <a:ext cx="6980388" cy="4709160"/>
+            <a:off x="566928" y="2404866"/>
+            <a:ext cx="6976872" cy="2862083"/>
           </a:xfrm>
           <a:prstGeom prst="rect">
             <a:avLst/>
@@ -9703,12 +9715,12 @@
         </p:nvSpPr>
         <p:spPr>
           <a:xfrm>
-            <a:off x="7803348" y="1481328"/>
-            <a:ext cx="3818676" cy="4709160"/>
+            <a:off x="7799832" y="1481328"/>
+            <a:ext cx="3822192" cy="4709160"/>
           </a:xfrm>
           <a:prstGeom prst="roundRect">
             <a:avLst>
-              <a:gd name="adj" fmla="val 1676"/>
+              <a:gd name="adj" fmla="val 1675"/>
             </a:avLst>
           </a:prstGeom>
           <a:solidFill>
@@ -9725,8 +9737,8 @@
         </p:nvSpPr>
         <p:spPr>
           <a:xfrm>
-            <a:off x="8059380" y="1737360"/>
-            <a:ext cx="3306612" cy="365760"/>
+            <a:off x="8055864" y="1737360"/>
+            <a:ext cx="3310128" cy="365760"/>
           </a:xfrm>
           <a:prstGeom prst="rect">
             <a:avLst/>
@@ -9764,8 +9776,8 @@
         </p:nvSpPr>
         <p:spPr>
           <a:xfrm>
-            <a:off x="8059380" y="2212848"/>
-            <a:ext cx="3306612" cy="3749040"/>
+            <a:off x="8055864" y="2212848"/>
+            <a:ext cx="3310128" cy="3749040"/>
           </a:xfrm>
           <a:prstGeom prst="rect">
             <a:avLst/>
@@ -10013,14 +10025,20 @@
       </p:sp>
       <p:pic>
         <p:nvPicPr>
-          <p:cNvPr id="5" name="Image 0" descr=".tmp/trimmed_image4.png">    </p:cNvPr>
+          <p:cNvPr id="5" name="Image 0" descr="../docs/项目简介/img/usage2-remote.svg">    </p:cNvPr>
           <p:cNvPicPr>
             <a:picLocks noChangeAspect="1"/>
           </p:cNvPicPr>
           <p:nvPr/>
         </p:nvPicPr>
         <p:blipFill>
-          <a:blip r:embed="rId1"/>
+          <a:blip r:embed="rId1">
+            <a:extLst>
+              <a:ext uri="{96DAC541-7B7A-43D3-8B79-37D633B846F1}">
+                <asvg:svgBlip xmlns:asvg="http://schemas.microsoft.com/office/drawing/2016/SVG/main" r:embed="rId2"/>
+              </a:ext>
+            </a:extLst>
+          </a:blip>
           <a:stretch>
             <a:fillRect/>
           </a:stretch>
@@ -10028,7 +10046,7 @@
         <p:spPr>
           <a:xfrm>
             <a:off x="566928" y="1481328"/>
-            <a:ext cx="6292380" cy="4709160"/>
+            <a:ext cx="5549137" cy="4709160"/>
           </a:xfrm>
           <a:prstGeom prst="rect">
             <a:avLst/>
@@ -10043,12 +10061,12 @@
         </p:nvSpPr>
         <p:spPr>
           <a:xfrm>
-            <a:off x="7115340" y="1481328"/>
-            <a:ext cx="4506684" cy="4709160"/>
+            <a:off x="6372097" y="1481328"/>
+            <a:ext cx="5249927" cy="4709160"/>
           </a:xfrm>
           <a:prstGeom prst="roundRect">
             <a:avLst>
-              <a:gd name="adj" fmla="val 1420"/>
+              <a:gd name="adj" fmla="val 1359"/>
             </a:avLst>
           </a:prstGeom>
           <a:solidFill>
@@ -10065,8 +10083,8 @@
         </p:nvSpPr>
         <p:spPr>
           <a:xfrm>
-            <a:off x="7371372" y="1737360"/>
-            <a:ext cx="3994620" cy="365760"/>
+            <a:off x="6628129" y="1737360"/>
+            <a:ext cx="4737863" cy="365760"/>
           </a:xfrm>
           <a:prstGeom prst="rect">
             <a:avLst/>
@@ -10104,8 +10122,8 @@
         </p:nvSpPr>
         <p:spPr>
           <a:xfrm>
-            <a:off x="7371372" y="2212848"/>
-            <a:ext cx="3994620" cy="3749040"/>
+            <a:off x="6628129" y="2212848"/>
+            <a:ext cx="4737863" cy="3749040"/>
           </a:xfrm>
           <a:prstGeom prst="rect">
             <a:avLst/>

--- a/ppt/embedded-mcp-toolkit-项目介绍.pptx
+++ b/ppt/embedded-mcp-toolkit-项目介绍.pptx
@@ -9679,7 +9679,7 @@
       </p:sp>
       <p:pic>
         <p:nvPicPr>
-          <p:cNvPr id="5" name="Image 0" descr="../docs/项目简介/img/usage1-local.svg">    </p:cNvPr>
+          <p:cNvPr id="5" name="Image 0" descr="../docs/项目简介/img/usage1-local.excalidraw.svg">    </p:cNvPr>
           <p:cNvPicPr>
             <a:picLocks noChangeAspect="1"/>
           </p:cNvPicPr>
@@ -9699,8 +9699,8 @@
         </p:blipFill>
         <p:spPr>
           <a:xfrm>
-            <a:off x="566928" y="2404866"/>
-            <a:ext cx="6976872" cy="2862083"/>
+            <a:off x="566928" y="1246009"/>
+            <a:ext cx="6976872" cy="5179799"/>
           </a:xfrm>
           <a:prstGeom prst="rect">
             <a:avLst/>
@@ -10025,7 +10025,7 @@
       </p:sp>
       <p:pic>
         <p:nvPicPr>
-          <p:cNvPr id="5" name="Image 0" descr="../docs/项目简介/img/usage2-remote.svg">    </p:cNvPr>
+          <p:cNvPr id="5" name="Image 0" descr="../docs/项目简介/img/usage2-remote.excalidraw.svg">    </p:cNvPr>
           <p:cNvPicPr>
             <a:picLocks noChangeAspect="1"/>
           </p:cNvPicPr>
@@ -10045,8 +10045,8 @@
         </p:blipFill>
         <p:spPr>
           <a:xfrm>
-            <a:off x="566928" y="1481328"/>
-            <a:ext cx="5549137" cy="4709160"/>
+            <a:off x="1552154" y="1371600"/>
+            <a:ext cx="9084644" cy="3840480"/>
           </a:xfrm>
           <a:prstGeom prst="rect">
             <a:avLst/>
@@ -10061,12 +10061,12 @@
         </p:nvSpPr>
         <p:spPr>
           <a:xfrm>
-            <a:off x="6372097" y="1481328"/>
-            <a:ext cx="5249927" cy="4709160"/>
+            <a:off x="566928" y="5394960"/>
+            <a:ext cx="11055096" cy="1005840"/>
           </a:xfrm>
           <a:prstGeom prst="roundRect">
             <a:avLst>
-              <a:gd name="adj" fmla="val 1359"/>
+              <a:gd name="adj" fmla="val 6364"/>
             </a:avLst>
           </a:prstGeom>
           <a:solidFill>
@@ -10083,8 +10083,8 @@
         </p:nvSpPr>
         <p:spPr>
           <a:xfrm>
-            <a:off x="6628129" y="1737360"/>
-            <a:ext cx="4737863" cy="365760"/>
+            <a:off x="822960" y="5486400"/>
+            <a:ext cx="731520" cy="274320"/>
           </a:xfrm>
           <a:prstGeom prst="rect">
             <a:avLst/>
@@ -10100,7 +10100,7 @@
               <a:buNone/>
             </a:pPr>
             <a:r>
-              <a:rPr lang="en-US" sz="1600" b="1" dirty="0">
+              <a:rPr lang="en-US" sz="1400" b="1" dirty="0">
                 <a:solidFill>
                   <a:srgbClr val="1F3A54"/>
                 </a:solidFill>
@@ -10110,7 +10110,7 @@
               </a:rPr>
               <a:t>要点</a:t>
             </a:r>
-            <a:endParaRPr lang="en-US" sz="1600" dirty="0"/>
+            <a:endParaRPr lang="en-US" sz="1400" dirty="0"/>
           </a:p>
         </p:txBody>
       </p:sp>
@@ -10122,8 +10122,8 @@
         </p:nvSpPr>
         <p:spPr>
           <a:xfrm>
-            <a:off x="6628129" y="2212848"/>
-            <a:ext cx="4737863" cy="3749040"/>
+            <a:off x="1572768" y="5486400"/>
+            <a:ext cx="9793224" cy="822960"/>
           </a:xfrm>
           <a:prstGeom prst="rect">
             <a:avLst/>
@@ -10137,13 +10137,13 @@
           <a:p>
             <a:pPr marL="152400" indent="-152400">
               <a:spcAft>
-                <a:spcPts val="1200"/>
+                <a:spcPts val="600"/>
               </a:spcAft>
               <a:buSzPct val="100000"/>
               <a:buChar char="▸"/>
             </a:pPr>
             <a:r>
-              <a:rPr lang="en-US" sz="1250" dirty="0">
+              <a:rPr lang="en-US" sz="1100" dirty="0">
                 <a:solidFill>
                   <a:srgbClr val="22303E"/>
                 </a:solidFill>
@@ -10151,20 +10151,20 @@
                 <a:ea typeface="微软雅黑" pitchFamily="34" charset="-122"/>
                 <a:cs typeface="微软雅黑" pitchFamily="34" charset="-120"/>
               </a:rPr>
-              <a:t>为什么：COM3 / USB-ADB / PowerShell 绑定 Windows，Linux 够不到</a:t>
-            </a:r>
-            <a:endParaRPr lang="en-US" sz="1250" dirty="0"/>
+              <a:t>COM3 / USB-ADB / PowerShell 绑定 Windows，Linux 够不到 → MCP Server 留守 Windows</a:t>
+            </a:r>
+            <a:endParaRPr lang="en-US" sz="1100" dirty="0"/>
           </a:p>
           <a:p>
             <a:pPr marL="152400" indent="-152400">
               <a:spcAft>
-                <a:spcPts val="1200"/>
+                <a:spcPts val="600"/>
               </a:spcAft>
               <a:buSzPct val="100000"/>
               <a:buChar char="▸"/>
             </a:pPr>
             <a:r>
-              <a:rPr lang="en-US" sz="1250" dirty="0">
+              <a:rPr lang="en-US" sz="1100" dirty="0">
                 <a:solidFill>
                   <a:srgbClr val="22303E"/>
                 </a:solidFill>
@@ -10172,20 +10172,20 @@
                 <a:ea typeface="微软雅黑" pitchFamily="34" charset="-122"/>
                 <a:cs typeface="微软雅黑" pitchFamily="34" charset="-120"/>
               </a:rPr>
-              <a:t>链路实质：JSON-RPC 写进 ssh stdin → TCP:22 → remote-start-mcp.bat 拉起的 node 进程，响应原路写回</a:t>
-            </a:r>
-            <a:endParaRPr lang="en-US" sz="1250" dirty="0"/>
+              <a:t>JSON-RPC 走 ssh stdin → TCP:22 → remote-start-mcp.bat 拉起 node，响应原路写回</a:t>
+            </a:r>
+            <a:endParaRPr lang="en-US" sz="1100" dirty="0"/>
           </a:p>
           <a:p>
             <a:pPr marL="152400" indent="-152400">
               <a:spcAft>
-                <a:spcPts val="1200"/>
+                <a:spcPts val="600"/>
               </a:spcAft>
               <a:buSzPct val="100000"/>
               <a:buChar char="▸"/>
             </a:pPr>
             <a:r>
-              <a:rPr lang="en-US" sz="1250" dirty="0">
+              <a:rPr lang="en-US" sz="1100" dirty="0">
                 <a:solidFill>
                   <a:srgbClr val="22303E"/>
                 </a:solidFill>
@@ -10193,30 +10193,9 @@
                 <a:ea typeface="微软雅黑" pitchFamily="34" charset="-122"/>
                 <a:cs typeface="微软雅黑" pitchFamily="34" charset="-120"/>
               </a:rPr>
-              <a:t>宿主端点提示：检测 SSH_CONNECTION，经 instructions + host_info 传达端点（仅 username@ip）</a:t>
-            </a:r>
-            <a:endParaRPr lang="en-US" sz="1250" dirty="0"/>
-          </a:p>
-          <a:p>
-            <a:pPr marL="152400" indent="-152400">
-              <a:spcAft>
-                <a:spcPts val="1200"/>
-              </a:spcAft>
-              <a:buSzPct val="100000"/>
-              <a:buChar char="▸"/>
-            </a:pPr>
-            <a:r>
-              <a:rPr lang="en-US" sz="1250" dirty="0">
-                <a:solidFill>
-                  <a:srgbClr val="22303E"/>
-                </a:solidFill>
-                <a:latin typeface="微软雅黑" pitchFamily="34" charset="0"/>
-                <a:ea typeface="微软雅黑" pitchFamily="34" charset="-122"/>
-                <a:cs typeface="微软雅黑" pitchFamily="34" charset="-120"/>
-              </a:rPr>
-              <a:t>编译路由指引：方式二下引导 AI 用本机交叉编译，避免绕圈</a:t>
-            </a:r>
-            <a:endParaRPr lang="en-US" sz="1250" dirty="0"/>
+              <a:t>宿主端点提示：检测 SSH_CONNECTION，经 instructions + host_info 传达端点</a:t>
+            </a:r>
+            <a:endParaRPr lang="en-US" sz="1100" dirty="0"/>
           </a:p>
         </p:txBody>
       </p:sp>
